--- a/Above All-CH.pptx
+++ b/Above All-CH.pptx
@@ -266,7 +266,7 @@
           <a:p>
             <a:fld id="{E759A0DE-F190-5444-87AC-4719D5F20D15}" type="datetimeFigureOut">
               <a:rPr lang="en-US" smtClean="0"/>
-              <a:t>7/4/26</a:t>
+              <a:t>7/19/26</a:t>
             </a:fld>
             <a:endParaRPr lang="en-US"/>
           </a:p>
@@ -464,7 +464,7 @@
           <a:p>
             <a:fld id="{E759A0DE-F190-5444-87AC-4719D5F20D15}" type="datetimeFigureOut">
               <a:rPr lang="en-US" smtClean="0"/>
-              <a:t>7/4/26</a:t>
+              <a:t>7/19/26</a:t>
             </a:fld>
             <a:endParaRPr lang="en-US"/>
           </a:p>
@@ -672,7 +672,7 @@
           <a:p>
             <a:fld id="{E759A0DE-F190-5444-87AC-4719D5F20D15}" type="datetimeFigureOut">
               <a:rPr lang="en-US" smtClean="0"/>
-              <a:t>7/4/26</a:t>
+              <a:t>7/19/26</a:t>
             </a:fld>
             <a:endParaRPr lang="en-US"/>
           </a:p>
@@ -870,7 +870,7 @@
           <a:p>
             <a:fld id="{E759A0DE-F190-5444-87AC-4719D5F20D15}" type="datetimeFigureOut">
               <a:rPr lang="en-US" smtClean="0"/>
-              <a:t>7/4/26</a:t>
+              <a:t>7/19/26</a:t>
             </a:fld>
             <a:endParaRPr lang="en-US"/>
           </a:p>
@@ -1145,7 +1145,7 @@
           <a:p>
             <a:fld id="{E759A0DE-F190-5444-87AC-4719D5F20D15}" type="datetimeFigureOut">
               <a:rPr lang="en-US" smtClean="0"/>
-              <a:t>7/4/26</a:t>
+              <a:t>7/19/26</a:t>
             </a:fld>
             <a:endParaRPr lang="en-US"/>
           </a:p>
@@ -1410,7 +1410,7 @@
           <a:p>
             <a:fld id="{E759A0DE-F190-5444-87AC-4719D5F20D15}" type="datetimeFigureOut">
               <a:rPr lang="en-US" smtClean="0"/>
-              <a:t>7/4/26</a:t>
+              <a:t>7/19/26</a:t>
             </a:fld>
             <a:endParaRPr lang="en-US"/>
           </a:p>
@@ -1822,7 +1822,7 @@
           <a:p>
             <a:fld id="{E759A0DE-F190-5444-87AC-4719D5F20D15}" type="datetimeFigureOut">
               <a:rPr lang="en-US" smtClean="0"/>
-              <a:t>7/4/26</a:t>
+              <a:t>7/19/26</a:t>
             </a:fld>
             <a:endParaRPr lang="en-US"/>
           </a:p>
@@ -1963,7 +1963,7 @@
           <a:p>
             <a:fld id="{E759A0DE-F190-5444-87AC-4719D5F20D15}" type="datetimeFigureOut">
               <a:rPr lang="en-US" smtClean="0"/>
-              <a:t>7/4/26</a:t>
+              <a:t>7/19/26</a:t>
             </a:fld>
             <a:endParaRPr lang="en-US"/>
           </a:p>
@@ -2076,7 +2076,7 @@
           <a:p>
             <a:fld id="{E759A0DE-F190-5444-87AC-4719D5F20D15}" type="datetimeFigureOut">
               <a:rPr lang="en-US" smtClean="0"/>
-              <a:t>7/4/26</a:t>
+              <a:t>7/19/26</a:t>
             </a:fld>
             <a:endParaRPr lang="en-US"/>
           </a:p>
@@ -2387,7 +2387,7 @@
           <a:p>
             <a:fld id="{E759A0DE-F190-5444-87AC-4719D5F20D15}" type="datetimeFigureOut">
               <a:rPr lang="en-US" smtClean="0"/>
-              <a:t>7/4/26</a:t>
+              <a:t>7/19/26</a:t>
             </a:fld>
             <a:endParaRPr lang="en-US"/>
           </a:p>
@@ -2675,7 +2675,7 @@
           <a:p>
             <a:fld id="{E759A0DE-F190-5444-87AC-4719D5F20D15}" type="datetimeFigureOut">
               <a:rPr lang="en-US" smtClean="0"/>
-              <a:t>7/4/26</a:t>
+              <a:t>7/19/26</a:t>
             </a:fld>
             <a:endParaRPr lang="en-US"/>
           </a:p>
@@ -2916,7 +2916,7 @@
           <a:p>
             <a:fld id="{E759A0DE-F190-5444-87AC-4719D5F20D15}" type="datetimeFigureOut">
               <a:rPr lang="en-US" smtClean="0"/>
-              <a:t>7/4/26</a:t>
+              <a:t>7/19/26</a:t>
             </a:fld>
             <a:endParaRPr lang="en-US"/>
           </a:p>
@@ -3898,6 +3898,36 @@
           <a:lstStyle/>
           <a:p>
             <a:pPr algn="l"/>
+            <a:r>
+              <a:rPr lang="en-US" sz="3600">
+                <a:solidFill>
+                  <a:srgbClr val="FFFF00"/>
+                </a:solidFill>
+                <a:latin typeface="Avenir Medium" panose="02000503020000020003" pitchFamily="2" charset="0"/>
+                <a:ea typeface="Bodoni Ornaments" pitchFamily="2" charset="0"/>
+              </a:rPr>
+              <a:t>CAPO 2</a:t>
+            </a:r>
+            <a:r>
+              <a:rPr lang="en-US" sz="3600" baseline="30000">
+                <a:solidFill>
+                  <a:srgbClr val="FFFF00"/>
+                </a:solidFill>
+                <a:latin typeface="Avenir Medium" panose="02000503020000020003" pitchFamily="2" charset="0"/>
+                <a:ea typeface="Bodoni Ornaments" pitchFamily="2" charset="0"/>
+              </a:rPr>
+              <a:t>nd</a:t>
+            </a:r>
+            <a:endParaRPr lang="en-US" sz="3600">
+              <a:solidFill>
+                <a:srgbClr val="FFFF00"/>
+              </a:solidFill>
+              <a:latin typeface="Avenir Medium" panose="02000503020000020003" pitchFamily="2" charset="0"/>
+              <a:ea typeface="Bodoni Ornaments" pitchFamily="2" charset="0"/>
+            </a:endParaRPr>
+          </a:p>
+          <a:p>
+            <a:pPr algn="l"/>
             <a:endParaRPr lang="en-US" sz="3600" dirty="0">
               <a:solidFill>
                 <a:srgbClr val="FFFF00"/>
